--- a/classes/parte-4-seguridad-de-aplicaciones-web/088-burp-suite-configuracion-y-flujo-de-trabajo/clase-088-presentacion.pptx
+++ b/classes/parte-4-seguridad-de-aplicaciones-web/088-burp-suite-configuracion-y-flujo-de-trabajo/clase-088-presentacion.pptx
@@ -17,6 +17,9 @@
     <p:sldId id="265" r:id="rId16"/>
     <p:sldId id="266" r:id="rId17"/>
     <p:sldId id="267" r:id="rId18"/>
+    <p:sldId id="268" r:id="rId19"/>
+    <p:sldId id="269" r:id="rId20"/>
+    <p:sldId id="270" r:id="rId21"/>
   </p:sldIdLst>
   <p:sldSz cx="9144000" cy="6858000" type="screen4x3"/>
   <p:notesSz cx="6858000" cy="9144000"/>
@@ -3198,7 +3201,7 @@
                   <a:srgbClr val="0B3D2E"/>
                 </a:solidFill>
               </a:rPr>
-              <a:t>⚠️ Errores comunes</a:t>
+              <a:t>✍️ Ejercicios</a:t>
             </a:r>
           </a:p>
         </p:txBody>
@@ -3236,67 +3239,82 @@
                   <a:srgbClr val="22282E"/>
                 </a:solidFill>
               </a:rPr>
-              <a:t>•  "Your connection is not private" — CA de Burp no instalado en el navegador</a:t>
-            </a:r>
-          </a:p>
-          <a:p>
-            <a:pPr>
-              <a:spcAft>
-                <a:spcPts val="600"/>
-              </a:spcAft>
-            </a:pPr>
-            <a:r>
-              <a:rPr sz="1500">
-                <a:solidFill>
-                  <a:srgbClr val="22282E"/>
-                </a:solidFill>
-              </a:rPr>
-              <a:t>•  No aparece tráfico — Proxy no configurado o listener apagado</a:t>
-            </a:r>
-          </a:p>
-          <a:p>
-            <a:pPr>
-              <a:spcAft>
-                <a:spcPts val="600"/>
-              </a:spcAft>
-            </a:pPr>
-            <a:r>
-              <a:rPr sz="1500">
-                <a:solidFill>
-                  <a:srgbClr val="22282E"/>
-                </a:solidFill>
-              </a:rPr>
-              <a:t>•  Intruder muy lento (Community) — Community limita la velocidad; usa listas pequeñas</a:t>
-            </a:r>
-          </a:p>
-          <a:p>
-            <a:pPr>
-              <a:spcAft>
-                <a:spcPts val="600"/>
-              </a:spcAft>
-            </a:pPr>
-            <a:r>
-              <a:rPr sz="1500">
-                <a:solidFill>
-                  <a:srgbClr val="22282E"/>
-                </a:solidFill>
-              </a:rPr>
-              <a:t>•  Se testea fuera de scope — Define y activa el scope antes de escanear</a:t>
-            </a:r>
-          </a:p>
-          <a:p>
-            <a:pPr>
-              <a:spcAft>
-                <a:spcPts val="600"/>
-              </a:spcAft>
-            </a:pPr>
-            <a:r>
-              <a:rPr sz="1500">
-                <a:solidFill>
-                  <a:srgbClr val="22282E"/>
-                </a:solidFill>
-              </a:rPr>
-              <a:t>•  Repeater no refleja cambios — Olvidaste pulsar "Send" tras editar</a:t>
+              <a:t>•  Configura Match/Replace para añadir una cabecera personalizada a toda petición.</a:t>
+            </a:r>
+          </a:p>
+          <a:p>
+            <a:pPr>
+              <a:spcAft>
+                <a:spcPts val="600"/>
+              </a:spcAft>
+            </a:pPr>
+            <a:r>
+              <a:rPr sz="1500">
+                <a:solidFill>
+                  <a:srgbClr val="22282E"/>
+                </a:solidFill>
+              </a:rPr>
+              <a:t>•  Usa Intruder en modo cluster bomb sobre dos parámetros a la vez.</a:t>
+            </a:r>
+          </a:p>
+          <a:p>
+            <a:pPr>
+              <a:spcAft>
+                <a:spcPts val="600"/>
+              </a:spcAft>
+            </a:pPr>
+            <a:r>
+              <a:rPr sz="1500">
+                <a:solidFill>
+                  <a:srgbClr val="22282E"/>
+                </a:solidFill>
+              </a:rPr>
+              <a:t>•  Filtra el HTTP history para ver solo respuestas con código 500.</a:t>
+            </a:r>
+          </a:p>
+          <a:p>
+            <a:pPr>
+              <a:spcAft>
+                <a:spcPts val="600"/>
+              </a:spcAft>
+            </a:pPr>
+            <a:r>
+              <a:rPr sz="1500">
+                <a:solidFill>
+                  <a:srgbClr val="22282E"/>
+                </a:solidFill>
+              </a:rPr>
+              <a:t>•  Guarda un item de historia y anótalo en la pestaña de Comentarios.</a:t>
+            </a:r>
+          </a:p>
+          <a:p>
+            <a:pPr>
+              <a:spcAft>
+                <a:spcPts val="600"/>
+              </a:spcAft>
+            </a:pPr>
+            <a:r>
+              <a:rPr sz="1500">
+                <a:solidFill>
+                  <a:srgbClr val="22282E"/>
+                </a:solidFill>
+              </a:rPr>
+              <a:t>•  Instala una extensión del BApp Store (p. ej. "JSON Web Tokens").</a:t>
+            </a:r>
+          </a:p>
+          <a:p>
+            <a:pPr>
+              <a:spcAft>
+                <a:spcPts val="600"/>
+              </a:spcAft>
+            </a:pPr>
+            <a:r>
+              <a:rPr sz="1500">
+                <a:solidFill>
+                  <a:srgbClr val="22282E"/>
+                </a:solidFill>
+              </a:rPr>
+              <a:t>•  Explica la diferencia entre sniper y pitchfork con un ejemplo.</a:t>
             </a:r>
           </a:p>
         </p:txBody>
@@ -3347,7 +3365,7 @@
                   <a:srgbClr val="0B3D2E"/>
                 </a:solidFill>
               </a:rPr>
-              <a:t>❓ Preguntas frecuentes</a:t>
+              <a:t>📝 Reto verificable</a:t>
             </a:r>
           </a:p>
         </p:txBody>
@@ -3385,82 +3403,22 @@
                   <a:srgbClr val="22282E"/>
                 </a:solidFill>
               </a:rPr>
-              <a:t>•  ❓ ¿Community o Professional?</a:t>
-            </a:r>
-          </a:p>
-          <a:p>
-            <a:pPr>
-              <a:spcAft>
-                <a:spcPts val="600"/>
-              </a:spcAft>
-            </a:pPr>
-            <a:r>
-              <a:rPr sz="1500">
-                <a:solidFill>
-                  <a:srgbClr val="22282E"/>
-                </a:solidFill>
-              </a:rPr>
-              <a:t>•  Community basta para aprender. Professional añade scanner activo, Intruder sin throttling y Collaborator.</a:t>
-            </a:r>
-          </a:p>
-          <a:p>
-            <a:pPr>
-              <a:spcAft>
-                <a:spcPts val="600"/>
-              </a:spcAft>
-            </a:pPr>
-            <a:r>
-              <a:rPr sz="1500">
-                <a:solidFill>
-                  <a:srgbClr val="22282E"/>
-                </a:solidFill>
-              </a:rPr>
-              <a:t>•  ❓ ¿Burp o ZAP?</a:t>
-            </a:r>
-          </a:p>
-          <a:p>
-            <a:pPr>
-              <a:spcAft>
-                <a:spcPts val="600"/>
-              </a:spcAft>
-            </a:pPr>
-            <a:r>
-              <a:rPr sz="1500">
-                <a:solidFill>
-                  <a:srgbClr val="22282E"/>
-                </a:solidFill>
-              </a:rPr>
-              <a:t>•  Ambas valen. Burp domina en la industria; ZAP es libre y automatizable. Verás ZAP en la próxima clase.</a:t>
-            </a:r>
-          </a:p>
-          <a:p>
-            <a:pPr>
-              <a:spcAft>
-                <a:spcPts val="600"/>
-              </a:spcAft>
-            </a:pPr>
-            <a:r>
-              <a:rPr sz="1500">
-                <a:solidFill>
-                  <a:srgbClr val="22282E"/>
-                </a:solidFill>
-              </a:rPr>
-              <a:t>•  ❓ ¿Cómo evito tocar sistemas ajenos?</a:t>
-            </a:r>
-          </a:p>
-          <a:p>
-            <a:pPr>
-              <a:spcAft>
-                <a:spcPts val="600"/>
-              </a:spcAft>
-            </a:pPr>
-            <a:r>
-              <a:rPr sz="1500">
-                <a:solidFill>
-                  <a:srgbClr val="22282E"/>
-                </a:solidFill>
-              </a:rPr>
-              <a:t>•  Define siempre el scope y activa "show only in-scope" y "drop out-of-scope requests".</a:t>
+              <a:t>•  Automatiza con Intruder un ataque de fuerza bruta al login de DVWA con una lista de 50 contraseñas y detecta la válida por diferencia en la longitud/código de respuesta.</a:t>
+            </a:r>
+          </a:p>
+          <a:p>
+            <a:pPr>
+              <a:spcAft>
+                <a:spcPts val="600"/>
+              </a:spcAft>
+            </a:pPr>
+            <a:r>
+              <a:rPr sz="1500">
+                <a:solidFill>
+                  <a:srgbClr val="22282E"/>
+                </a:solidFill>
+              </a:rPr>
+              <a:t>•  Criterio de aceptación: identificas la credencial correcta a partir de la anomalía en la respuesta y documentas la posición de payload y el filtro usado.</a:t>
             </a:r>
           </a:p>
         </p:txBody>
@@ -3511,7 +3469,7 @@
                   <a:srgbClr val="0B3D2E"/>
                 </a:solidFill>
               </a:rPr>
-              <a:t>🔗 Referencias</a:t>
+              <a:t>⚠️ Errores comunes</a:t>
             </a:r>
           </a:p>
         </p:txBody>
@@ -3549,6 +3507,319 @@
                   <a:srgbClr val="22282E"/>
                 </a:solidFill>
               </a:rPr>
+              <a:t>•  "Your connection is not private" — CA de Burp no instalado en el navegador</a:t>
+            </a:r>
+          </a:p>
+          <a:p>
+            <a:pPr>
+              <a:spcAft>
+                <a:spcPts val="600"/>
+              </a:spcAft>
+            </a:pPr>
+            <a:r>
+              <a:rPr sz="1500">
+                <a:solidFill>
+                  <a:srgbClr val="22282E"/>
+                </a:solidFill>
+              </a:rPr>
+              <a:t>•  No aparece tráfico — Proxy no configurado o listener apagado</a:t>
+            </a:r>
+          </a:p>
+          <a:p>
+            <a:pPr>
+              <a:spcAft>
+                <a:spcPts val="600"/>
+              </a:spcAft>
+            </a:pPr>
+            <a:r>
+              <a:rPr sz="1500">
+                <a:solidFill>
+                  <a:srgbClr val="22282E"/>
+                </a:solidFill>
+              </a:rPr>
+              <a:t>•  Intruder muy lento (Community) — Community limita la velocidad; usa listas pequeñas</a:t>
+            </a:r>
+          </a:p>
+          <a:p>
+            <a:pPr>
+              <a:spcAft>
+                <a:spcPts val="600"/>
+              </a:spcAft>
+            </a:pPr>
+            <a:r>
+              <a:rPr sz="1500">
+                <a:solidFill>
+                  <a:srgbClr val="22282E"/>
+                </a:solidFill>
+              </a:rPr>
+              <a:t>•  Se testea fuera de scope — Define y activa el scope antes de escanear</a:t>
+            </a:r>
+          </a:p>
+          <a:p>
+            <a:pPr>
+              <a:spcAft>
+                <a:spcPts val="600"/>
+              </a:spcAft>
+            </a:pPr>
+            <a:r>
+              <a:rPr sz="1500">
+                <a:solidFill>
+                  <a:srgbClr val="22282E"/>
+                </a:solidFill>
+              </a:rPr>
+              <a:t>•  Repeater no refleja cambios — Olvidaste pulsar "Send" tras editar</a:t>
+            </a:r>
+          </a:p>
+        </p:txBody>
+      </p:sp>
+    </p:spTree>
+  </p:cSld>
+  <p:clrMapOvr>
+    <a:masterClrMapping/>
+  </p:clrMapOvr>
+</p:sld>
+</file>
+
+<file path=ppt/slides/slide13.xml><?xml version="1.0" encoding="utf-8"?>
+<p:sld xmlns:a="http://schemas.openxmlformats.org/drawingml/2006/main" xmlns:p="http://schemas.openxmlformats.org/presentationml/2006/main" xmlns:r="http://schemas.openxmlformats.org/officeDocument/2006/relationships">
+  <p:cSld>
+    <p:spTree>
+      <p:nvGrpSpPr>
+        <p:cNvPr id="1" name=""/>
+        <p:cNvGrpSpPr/>
+        <p:nvPr/>
+      </p:nvGrpSpPr>
+      <p:grpSpPr/>
+      <p:sp>
+        <p:nvSpPr>
+          <p:cNvPr id="2" name="TextBox 1"/>
+          <p:cNvSpPr txBox="1"/>
+          <p:nvPr/>
+        </p:nvSpPr>
+        <p:spPr>
+          <a:xfrm>
+            <a:off x="457200" y="320040"/>
+            <a:ext cx="8229600" cy="822960"/>
+          </a:xfrm>
+          <a:prstGeom prst="rect">
+            <a:avLst/>
+          </a:prstGeom>
+          <a:noFill/>
+        </p:spPr>
+        <p:txBody>
+          <a:bodyPr wrap="square">
+            <a:spAutoFit/>
+          </a:bodyPr>
+          <a:lstStyle/>
+          <a:p>
+            <a:r>
+              <a:rPr sz="2600" b="1">
+                <a:solidFill>
+                  <a:srgbClr val="0B3D2E"/>
+                </a:solidFill>
+              </a:rPr>
+              <a:t>❓ Preguntas frecuentes</a:t>
+            </a:r>
+          </a:p>
+        </p:txBody>
+      </p:sp>
+      <p:sp>
+        <p:nvSpPr>
+          <p:cNvPr id="3" name="TextBox 2"/>
+          <p:cNvSpPr txBox="1"/>
+          <p:nvPr/>
+        </p:nvSpPr>
+        <p:spPr>
+          <a:xfrm>
+            <a:off x="457200" y="1280160"/>
+            <a:ext cx="8229600" cy="4937760"/>
+          </a:xfrm>
+          <a:prstGeom prst="rect">
+            <a:avLst/>
+          </a:prstGeom>
+          <a:noFill/>
+        </p:spPr>
+        <p:txBody>
+          <a:bodyPr wrap="square">
+            <a:spAutoFit/>
+          </a:bodyPr>
+          <a:lstStyle/>
+          <a:p>
+            <a:pPr>
+              <a:spcAft>
+                <a:spcPts val="600"/>
+              </a:spcAft>
+            </a:pPr>
+            <a:r>
+              <a:rPr sz="1500">
+                <a:solidFill>
+                  <a:srgbClr val="22282E"/>
+                </a:solidFill>
+              </a:rPr>
+              <a:t>•  ❓ ¿Community o Professional?</a:t>
+            </a:r>
+          </a:p>
+          <a:p>
+            <a:pPr>
+              <a:spcAft>
+                <a:spcPts val="600"/>
+              </a:spcAft>
+            </a:pPr>
+            <a:r>
+              <a:rPr sz="1500">
+                <a:solidFill>
+                  <a:srgbClr val="22282E"/>
+                </a:solidFill>
+              </a:rPr>
+              <a:t>•  Community basta para aprender. Professional añade scanner activo, Intruder sin throttling y Collaborator.</a:t>
+            </a:r>
+          </a:p>
+          <a:p>
+            <a:pPr>
+              <a:spcAft>
+                <a:spcPts val="600"/>
+              </a:spcAft>
+            </a:pPr>
+            <a:r>
+              <a:rPr sz="1500">
+                <a:solidFill>
+                  <a:srgbClr val="22282E"/>
+                </a:solidFill>
+              </a:rPr>
+              <a:t>•  ❓ ¿Burp o ZAP?</a:t>
+            </a:r>
+          </a:p>
+          <a:p>
+            <a:pPr>
+              <a:spcAft>
+                <a:spcPts val="600"/>
+              </a:spcAft>
+            </a:pPr>
+            <a:r>
+              <a:rPr sz="1500">
+                <a:solidFill>
+                  <a:srgbClr val="22282E"/>
+                </a:solidFill>
+              </a:rPr>
+              <a:t>•  Ambas valen. Burp domina en la industria; ZAP es libre y automatizable. Verás ZAP en la próxima clase.</a:t>
+            </a:r>
+          </a:p>
+          <a:p>
+            <a:pPr>
+              <a:spcAft>
+                <a:spcPts val="600"/>
+              </a:spcAft>
+            </a:pPr>
+            <a:r>
+              <a:rPr sz="1500">
+                <a:solidFill>
+                  <a:srgbClr val="22282E"/>
+                </a:solidFill>
+              </a:rPr>
+              <a:t>•  ❓ ¿Cómo evito tocar sistemas ajenos?</a:t>
+            </a:r>
+          </a:p>
+          <a:p>
+            <a:pPr>
+              <a:spcAft>
+                <a:spcPts val="600"/>
+              </a:spcAft>
+            </a:pPr>
+            <a:r>
+              <a:rPr sz="1500">
+                <a:solidFill>
+                  <a:srgbClr val="22282E"/>
+                </a:solidFill>
+              </a:rPr>
+              <a:t>•  Define siempre el scope y activa "show only in-scope" y "drop out-of-scope requests".</a:t>
+            </a:r>
+          </a:p>
+        </p:txBody>
+      </p:sp>
+    </p:spTree>
+  </p:cSld>
+  <p:clrMapOvr>
+    <a:masterClrMapping/>
+  </p:clrMapOvr>
+</p:sld>
+</file>
+
+<file path=ppt/slides/slide14.xml><?xml version="1.0" encoding="utf-8"?>
+<p:sld xmlns:a="http://schemas.openxmlformats.org/drawingml/2006/main" xmlns:p="http://schemas.openxmlformats.org/presentationml/2006/main" xmlns:r="http://schemas.openxmlformats.org/officeDocument/2006/relationships">
+  <p:cSld>
+    <p:spTree>
+      <p:nvGrpSpPr>
+        <p:cNvPr id="1" name=""/>
+        <p:cNvGrpSpPr/>
+        <p:nvPr/>
+      </p:nvGrpSpPr>
+      <p:grpSpPr/>
+      <p:sp>
+        <p:nvSpPr>
+          <p:cNvPr id="2" name="TextBox 1"/>
+          <p:cNvSpPr txBox="1"/>
+          <p:nvPr/>
+        </p:nvSpPr>
+        <p:spPr>
+          <a:xfrm>
+            <a:off x="457200" y="320040"/>
+            <a:ext cx="8229600" cy="822960"/>
+          </a:xfrm>
+          <a:prstGeom prst="rect">
+            <a:avLst/>
+          </a:prstGeom>
+          <a:noFill/>
+        </p:spPr>
+        <p:txBody>
+          <a:bodyPr wrap="square">
+            <a:spAutoFit/>
+          </a:bodyPr>
+          <a:lstStyle/>
+          <a:p>
+            <a:r>
+              <a:rPr sz="2600" b="1">
+                <a:solidFill>
+                  <a:srgbClr val="0B3D2E"/>
+                </a:solidFill>
+              </a:rPr>
+              <a:t>🔗 Referencias</a:t>
+            </a:r>
+          </a:p>
+        </p:txBody>
+      </p:sp>
+      <p:sp>
+        <p:nvSpPr>
+          <p:cNvPr id="3" name="TextBox 2"/>
+          <p:cNvSpPr txBox="1"/>
+          <p:nvPr/>
+        </p:nvSpPr>
+        <p:spPr>
+          <a:xfrm>
+            <a:off x="457200" y="1280160"/>
+            <a:ext cx="8229600" cy="4937760"/>
+          </a:xfrm>
+          <a:prstGeom prst="rect">
+            <a:avLst/>
+          </a:prstGeom>
+          <a:noFill/>
+        </p:spPr>
+        <p:txBody>
+          <a:bodyPr wrap="square">
+            <a:spAutoFit/>
+          </a:bodyPr>
+          <a:lstStyle/>
+          <a:p>
+            <a:pPr>
+              <a:spcAft>
+                <a:spcPts val="600"/>
+              </a:spcAft>
+            </a:pPr>
+            <a:r>
+              <a:rPr sz="1500">
+                <a:solidFill>
+                  <a:srgbClr val="22282E"/>
+                </a:solidFill>
+              </a:rPr>
               <a:t>•  Stuttard &amp; Pinto, The Web Application Hacker's Handbook, cap. 20 (herramientas).</a:t>
             </a:r>
           </a:p>
@@ -3584,6 +3855,81 @@
           </a:p>
         </p:txBody>
       </p:sp>
+    </p:spTree>
+  </p:cSld>
+  <p:clrMapOvr>
+    <a:masterClrMapping/>
+  </p:clrMapOvr>
+</p:sld>
+</file>
+
+<file path=ppt/slides/slide15.xml><?xml version="1.0" encoding="utf-8"?>
+<p:sld xmlns:a="http://schemas.openxmlformats.org/drawingml/2006/main" xmlns:p="http://schemas.openxmlformats.org/presentationml/2006/main" xmlns:r="http://schemas.openxmlformats.org/officeDocument/2006/relationships">
+  <p:cSld>
+    <p:spTree>
+      <p:nvGrpSpPr>
+        <p:cNvPr id="1" name=""/>
+        <p:cNvGrpSpPr/>
+        <p:nvPr/>
+      </p:nvGrpSpPr>
+      <p:grpSpPr/>
+      <p:sp>
+        <p:nvSpPr>
+          <p:cNvPr id="2" name="TextBox 1"/>
+          <p:cNvSpPr txBox="1"/>
+          <p:nvPr/>
+        </p:nvSpPr>
+        <p:spPr>
+          <a:xfrm>
+            <a:off x="457200" y="274320"/>
+            <a:ext cx="8229600" cy="640080"/>
+          </a:xfrm>
+          <a:prstGeom prst="rect">
+            <a:avLst/>
+          </a:prstGeom>
+          <a:noFill/>
+        </p:spPr>
+        <p:txBody>
+          <a:bodyPr wrap="square">
+            <a:spAutoFit/>
+          </a:bodyPr>
+          <a:lstStyle/>
+          <a:p>
+            <a:r>
+              <a:rPr sz="2200" b="1">
+                <a:solidFill>
+                  <a:srgbClr val="0B3D2E"/>
+                </a:solidFill>
+              </a:rPr>
+              <a:t>Diagrama de la clase</a:t>
+            </a:r>
+          </a:p>
+        </p:txBody>
+      </p:sp>
+      <p:pic>
+        <p:nvPicPr>
+          <p:cNvPr id="3" name="Picture 2" descr="1e8cdd49d8497c88.png"/>
+          <p:cNvPicPr>
+            <a:picLocks noChangeAspect="1"/>
+          </p:cNvPicPr>
+          <p:nvPr/>
+        </p:nvPicPr>
+        <p:blipFill>
+          <a:blip r:embed="rId2"/>
+          <a:stretch>
+            <a:fillRect/>
+          </a:stretch>
+        </p:blipFill>
+        <p:spPr>
+          <a:xfrm>
+            <a:off x="554633" y="1097280"/>
+            <a:ext cx="8034733" cy="5303520"/>
+          </a:xfrm>
+          <a:prstGeom prst="rect">
+            <a:avLst/>
+          </a:prstGeom>
+        </p:spPr>
+      </p:pic>
     </p:spTree>
   </p:cSld>
   <p:clrMapOvr>
@@ -3668,7 +4014,7 @@
                   <a:srgbClr val="22282E"/>
                 </a:solidFill>
               </a:rPr>
-              <a:t>•  Instalar, configurar y dominar el flujo de trabajo de Burp Suite, la navaja suiza del pentesting web. Al terminar sabrás interceptar, modificar, repetir y automatizar peticiones HTTP con soltura, la base operativa de casi todas las clases siguientes.</a:t>
+              <a:t>•  Instalar, configurar y dominar el flujo de trabajo de Burp Suite, la navaja suiza del pentesting web. Al terminar sabrás interceptar, modificar, repetir y automatizar peticiones HTTP con soltura, la…</a:t>
             </a:r>
           </a:p>
         </p:txBody>
@@ -4062,7 +4408,7 @@
                   <a:srgbClr val="0B3D2E"/>
                 </a:solidFill>
               </a:rPr>
-              <a:t>📖 Definiciones y características</a:t>
+              <a:t>🧠 Explicación en profundidad</a:t>
             </a:r>
           </a:p>
         </p:txBody>
@@ -4100,82 +4446,97 @@
                   <a:srgbClr val="22282E"/>
                 </a:solidFill>
               </a:rPr>
-              <a:t>•  Proxy interceptor: intermediario que captura el tráfico entre navegador y servidor. Característica: permite pausar y editar cada petición.</a:t>
-            </a:r>
-          </a:p>
-          <a:p>
-            <a:pPr>
-              <a:spcAft>
-                <a:spcPts val="600"/>
-              </a:spcAft>
-            </a:pPr>
-            <a:r>
-              <a:rPr sz="1500">
-                <a:solidFill>
-                  <a:srgbClr val="22282E"/>
-                </a:solidFill>
-              </a:rPr>
-              <a:t>•  Repeater: herramienta para reenviar una petición modificada N veces. Característica: ideal para afinar un payload manualmente.</a:t>
-            </a:r>
-          </a:p>
-          <a:p>
-            <a:pPr>
-              <a:spcAft>
-                <a:spcPts val="600"/>
-              </a:spcAft>
-            </a:pPr>
-            <a:r>
-              <a:rPr sz="1500">
-                <a:solidFill>
-                  <a:srgbClr val="22282E"/>
-                </a:solidFill>
-              </a:rPr>
-              <a:t>•  Intruder: motor de automatización con posiciones de payload. Característica: modos sniper, battering ram, pitchfork y cluster bomb.</a:t>
-            </a:r>
-          </a:p>
-          <a:p>
-            <a:pPr>
-              <a:spcAft>
-                <a:spcPts val="600"/>
-              </a:spcAft>
-            </a:pPr>
-            <a:r>
-              <a:rPr sz="1500">
-                <a:solidFill>
-                  <a:srgbClr val="22282E"/>
-                </a:solidFill>
-              </a:rPr>
-              <a:t>•  Scope: definición de qué hosts están dentro del test. Característica: evita tocar sistemas no autorizados.</a:t>
-            </a:r>
-          </a:p>
-          <a:p>
-            <a:pPr>
-              <a:spcAft>
-                <a:spcPts val="600"/>
-              </a:spcAft>
-            </a:pPr>
-            <a:r>
-              <a:rPr sz="1500">
-                <a:solidFill>
-                  <a:srgbClr val="22282E"/>
-                </a:solidFill>
-              </a:rPr>
-              <a:t>•  Match/Replace: reglas que reescriben peticiones/respuestas automáticamente. Característica: útil para persistir cabeceras o tokens.</a:t>
-            </a:r>
-          </a:p>
-          <a:p>
-            <a:pPr>
-              <a:spcAft>
-                <a:spcPts val="600"/>
-              </a:spcAft>
-            </a:pPr>
-            <a:r>
-              <a:rPr sz="1500">
-                <a:solidFill>
-                  <a:srgbClr val="22282E"/>
-                </a:solidFill>
-              </a:rPr>
-              <a:t>•  Collaborator: servidor externo de Burp para detectar interacciones out-of-band. Característica: revela SSRF/blind ciegos (solo en Pro).</a:t>
+              <a:t>•  La herramienta central del pentesting web es un proxy de interceptación, y Burp Suite es</a:t>
+            </a:r>
+          </a:p>
+          <a:p>
+            <a:pPr>
+              <a:spcAft>
+                <a:spcPts val="600"/>
+              </a:spcAft>
+            </a:pPr>
+            <a:r>
+              <a:rPr sz="1500">
+                <a:solidFill>
+                  <a:srgbClr val="22282E"/>
+                </a:solidFill>
+              </a:rPr>
+              <a:t>•  el estándar de la industria. La idea es sencilla y poderosa: Burp se coloca entre tu</a:t>
+            </a:r>
+          </a:p>
+          <a:p>
+            <a:pPr>
+              <a:spcAft>
+                <a:spcPts val="600"/>
+              </a:spcAft>
+            </a:pPr>
+            <a:r>
+              <a:rPr sz="1500">
+                <a:solidFill>
+                  <a:srgbClr val="22282E"/>
+                </a:solidFill>
+              </a:rPr>
+              <a:t>•  navegador y el servidor, de modo que cada petición y cada respuesta pasa por él y se puede</a:t>
+            </a:r>
+          </a:p>
+          <a:p>
+            <a:pPr>
+              <a:spcAft>
+                <a:spcPts val="600"/>
+              </a:spcAft>
+            </a:pPr>
+            <a:r>
+              <a:rPr sz="1500">
+                <a:solidFill>
+                  <a:srgbClr val="22282E"/>
+                </a:solidFill>
+              </a:rPr>
+              <a:t>•  ver, pausar, modificar y reenviar. Eso derriba de un golpe la principal barrera de la</a:t>
+            </a:r>
+          </a:p>
+          <a:p>
+            <a:pPr>
+              <a:spcAft>
+                <a:spcPts val="600"/>
+              </a:spcAft>
+            </a:pPr>
+            <a:r>
+              <a:rPr sz="1500">
+                <a:solidFill>
+                  <a:srgbClr val="22282E"/>
+                </a:solidFill>
+              </a:rPr>
+              <a:t>•  seguridad web —que la lógica del cliente parece intocable—: con Burp, todo lo que el</a:t>
+            </a:r>
+          </a:p>
+          <a:p>
+            <a:pPr>
+              <a:spcAft>
+                <a:spcPts val="600"/>
+              </a:spcAft>
+            </a:pPr>
+            <a:r>
+              <a:rPr sz="1500">
+                <a:solidFill>
+                  <a:srgbClr val="22282E"/>
+                </a:solidFill>
+              </a:rPr>
+              <a:t>•  navegador envía es material moldeable antes de llegar al servidor, así que cualquier</a:t>
+            </a:r>
+          </a:p>
+          <a:p>
+            <a:pPr>
+              <a:spcAft>
+                <a:spcPts val="600"/>
+              </a:spcAft>
+            </a:pPr>
+            <a:r>
+              <a:rPr sz="1500">
+                <a:solidFill>
+                  <a:srgbClr val="22282E"/>
+                </a:solidFill>
+              </a:rPr>
+              <a:t>•  validación hecha en el JavaScript se salta editando la petición directamente.</a:t>
             </a:r>
           </a:p>
         </p:txBody>
@@ -4226,7 +4587,7 @@
                   <a:srgbClr val="0B3D2E"/>
                 </a:solidFill>
               </a:rPr>
-              <a:t>🧰 Herramientas y preparación</a:t>
+              <a:t>📖 Definiciones y características</a:t>
             </a:r>
           </a:p>
         </p:txBody>
@@ -4264,37 +4625,82 @@
                   <a:srgbClr val="22282E"/>
                 </a:solidFill>
               </a:rPr>
-              <a:t>•  Burp Suite Community (gratuita) o Professional.</a:t>
-            </a:r>
-          </a:p>
-          <a:p>
-            <a:pPr>
-              <a:spcAft>
-                <a:spcPts val="600"/>
-              </a:spcAft>
-            </a:pPr>
-            <a:r>
-              <a:rPr sz="1500">
-                <a:solidFill>
-                  <a:srgbClr val="22282E"/>
-                </a:solidFill>
-              </a:rPr>
-              <a:t>•  Navegador dedicado al testing (perfil separado) o el navegador embebido de Burp.</a:t>
-            </a:r>
-          </a:p>
-          <a:p>
-            <a:pPr>
-              <a:spcAft>
-                <a:spcPts val="600"/>
-              </a:spcAft>
-            </a:pPr>
-            <a:r>
-              <a:rPr sz="1500">
-                <a:solidFill>
-                  <a:srgbClr val="22282E"/>
-                </a:solidFill>
-              </a:rPr>
-              <a:t>•  Laboratorio local: Juice Shop o DVWA.</a:t>
+              <a:t>•  Proxy interceptor: intermediario que captura el tráfico entre navegador y servidor. Característica: permite pausar y editar cada petición.</a:t>
+            </a:r>
+          </a:p>
+          <a:p>
+            <a:pPr>
+              <a:spcAft>
+                <a:spcPts val="600"/>
+              </a:spcAft>
+            </a:pPr>
+            <a:r>
+              <a:rPr sz="1500">
+                <a:solidFill>
+                  <a:srgbClr val="22282E"/>
+                </a:solidFill>
+              </a:rPr>
+              <a:t>•  Repeater: herramienta para reenviar una petición modificada N veces. Característica: ideal para afinar un payload manualmente.</a:t>
+            </a:r>
+          </a:p>
+          <a:p>
+            <a:pPr>
+              <a:spcAft>
+                <a:spcPts val="600"/>
+              </a:spcAft>
+            </a:pPr>
+            <a:r>
+              <a:rPr sz="1500">
+                <a:solidFill>
+                  <a:srgbClr val="22282E"/>
+                </a:solidFill>
+              </a:rPr>
+              <a:t>•  Intruder: motor de automatización con posiciones de payload. Característica: modos sniper, battering ram, pitchfork y cluster bomb.</a:t>
+            </a:r>
+          </a:p>
+          <a:p>
+            <a:pPr>
+              <a:spcAft>
+                <a:spcPts val="600"/>
+              </a:spcAft>
+            </a:pPr>
+            <a:r>
+              <a:rPr sz="1500">
+                <a:solidFill>
+                  <a:srgbClr val="22282E"/>
+                </a:solidFill>
+              </a:rPr>
+              <a:t>•  Scope: definición de qué hosts están dentro del test. Característica: evita tocar sistemas no autorizados.</a:t>
+            </a:r>
+          </a:p>
+          <a:p>
+            <a:pPr>
+              <a:spcAft>
+                <a:spcPts val="600"/>
+              </a:spcAft>
+            </a:pPr>
+            <a:r>
+              <a:rPr sz="1500">
+                <a:solidFill>
+                  <a:srgbClr val="22282E"/>
+                </a:solidFill>
+              </a:rPr>
+              <a:t>•  Match/Replace: reglas que reescriben peticiones/respuestas automáticamente. Característica: útil para persistir cabeceras o tokens.</a:t>
+            </a:r>
+          </a:p>
+          <a:p>
+            <a:pPr>
+              <a:spcAft>
+                <a:spcPts val="600"/>
+              </a:spcAft>
+            </a:pPr>
+            <a:r>
+              <a:rPr sz="1500">
+                <a:solidFill>
+                  <a:srgbClr val="22282E"/>
+                </a:solidFill>
+              </a:rPr>
+              <a:t>•  Collaborator: servidor externo de Burp para detectar interacciones out-of-band. Característica: revela SSRF/blind ciegos (solo en Pro).</a:t>
             </a:r>
           </a:p>
         </p:txBody>
@@ -4345,7 +4751,7 @@
                   <a:srgbClr val="0B3D2E"/>
                 </a:solidFill>
               </a:rPr>
-              <a:t>🧪 Laboratorio guiado</a:t>
+              <a:t>📔 Glosario</a:t>
             </a:r>
           </a:p>
         </p:txBody>
@@ -4383,97 +4789,97 @@
                   <a:srgbClr val="22282E"/>
                 </a:solidFill>
               </a:rPr>
-              <a:t>•  Instala Burp y configura el listener en 127.0.0.1:8080 (Proxy → Options).</a:t>
-            </a:r>
-          </a:p>
-          <a:p>
-            <a:pPr>
-              <a:spcAft>
-                <a:spcPts val="600"/>
-              </a:spcAft>
-            </a:pPr>
-            <a:r>
-              <a:rPr sz="1500">
-                <a:solidFill>
-                  <a:srgbClr val="22282E"/>
-                </a:solidFill>
-              </a:rPr>
-              <a:t>•  Apunta el navegador a ese proxy o usa el navegador embebido de Burp (más simple).</a:t>
-            </a:r>
-          </a:p>
-          <a:p>
-            <a:pPr>
-              <a:spcAft>
-                <a:spcPts val="600"/>
-              </a:spcAft>
-            </a:pPr>
-            <a:r>
-              <a:rPr sz="1500">
-                <a:solidFill>
-                  <a:srgbClr val="22282E"/>
-                </a:solidFill>
-              </a:rPr>
-              <a:t>•  Exporta e instala el certificado CA para ver HTTPS sin advertencias.</a:t>
-            </a:r>
-          </a:p>
-          <a:p>
-            <a:pPr>
-              <a:spcAft>
-                <a:spcPts val="600"/>
-              </a:spcAft>
-            </a:pPr>
-            <a:r>
-              <a:rPr sz="1500">
-                <a:solidFill>
-                  <a:srgbClr val="22282E"/>
-                </a:solidFill>
-              </a:rPr>
-              <a:t>•  Navega Juice Shop; observa el tráfico en Proxy → HTTP history.</a:t>
-            </a:r>
-          </a:p>
-          <a:p>
-            <a:pPr>
-              <a:spcAft>
-                <a:spcPts val="600"/>
-              </a:spcAft>
-            </a:pPr>
-            <a:r>
-              <a:rPr sz="1500">
-                <a:solidFill>
-                  <a:srgbClr val="22282E"/>
-                </a:solidFill>
-              </a:rPr>
-              <a:t>•  Define el scope: Target → Site map → clic derecho en el host → Add to scope. Activa "show only in-scope".</a:t>
-            </a:r>
-          </a:p>
-          <a:p>
-            <a:pPr>
-              <a:spcAft>
-                <a:spcPts val="600"/>
-              </a:spcAft>
-            </a:pPr>
-            <a:r>
-              <a:rPr sz="1500">
-                <a:solidFill>
-                  <a:srgbClr val="22282E"/>
-                </a:solidFill>
-              </a:rPr>
-              <a:t>•  Intercepta un login (Proxy → Intercept ON), modifica un campo y reenvíalo.</a:t>
-            </a:r>
-          </a:p>
-          <a:p>
-            <a:pPr>
-              <a:spcAft>
-                <a:spcPts val="600"/>
-              </a:spcAft>
-            </a:pPr>
-            <a:r>
-              <a:rPr sz="1500">
-                <a:solidFill>
-                  <a:srgbClr val="22282E"/>
-                </a:solidFill>
-              </a:rPr>
-              <a:t>•  Envía esa petición a Repeater (Ctrl+R) y prueba variaciones del parámetro.</a:t>
+              <a:t>•  Término — Definición concisa</a:t>
+            </a:r>
+          </a:p>
+          <a:p>
+            <a:pPr>
+              <a:spcAft>
+                <a:spcPts val="600"/>
+              </a:spcAft>
+            </a:pPr>
+            <a:r>
+              <a:rPr sz="1500">
+                <a:solidFill>
+                  <a:srgbClr val="22282E"/>
+                </a:solidFill>
+              </a:rPr>
+              <a:t>•  Proxy de interceptación — Se sitúa entre navegador y servidor para ver y editar el tráfico</a:t>
+            </a:r>
+          </a:p>
+          <a:p>
+            <a:pPr>
+              <a:spcAft>
+                <a:spcPts val="600"/>
+              </a:spcAft>
+            </a:pPr>
+            <a:r>
+              <a:rPr sz="1500">
+                <a:solidFill>
+                  <a:srgbClr val="22282E"/>
+                </a:solidFill>
+              </a:rPr>
+              <a:t>•  Burp Suite — Proxy de pentesting web estándar de la industria</a:t>
+            </a:r>
+          </a:p>
+          <a:p>
+            <a:pPr>
+              <a:spcAft>
+                <a:spcPts val="600"/>
+              </a:spcAft>
+            </a:pPr>
+            <a:r>
+              <a:rPr sz="1500">
+                <a:solidFill>
+                  <a:srgbClr val="22282E"/>
+                </a:solidFill>
+              </a:rPr>
+              <a:t>•  CA de Burp — Certificado propio que hay que instalar para interceptar HTTPS</a:t>
+            </a:r>
+          </a:p>
+          <a:p>
+            <a:pPr>
+              <a:spcAft>
+                <a:spcPts val="600"/>
+              </a:spcAft>
+            </a:pPr>
+            <a:r>
+              <a:rPr sz="1500">
+                <a:solidFill>
+                  <a:srgbClr val="22282E"/>
+                </a:solidFill>
+              </a:rPr>
+              <a:t>•  Interceptar — Pausar una petición para modificarla antes de enviarla</a:t>
+            </a:r>
+          </a:p>
+          <a:p>
+            <a:pPr>
+              <a:spcAft>
+                <a:spcPts val="600"/>
+              </a:spcAft>
+            </a:pPr>
+            <a:r>
+              <a:rPr sz="1500">
+                <a:solidFill>
+                  <a:srgbClr val="22282E"/>
+                </a:solidFill>
+              </a:rPr>
+              <a:t>•  Target scope — Dominios autorizados; limita las herramientas automáticas</a:t>
+            </a:r>
+          </a:p>
+          <a:p>
+            <a:pPr>
+              <a:spcAft>
+                <a:spcPts val="600"/>
+              </a:spcAft>
+            </a:pPr>
+            <a:r>
+              <a:rPr sz="1500">
+                <a:solidFill>
+                  <a:srgbClr val="22282E"/>
+                </a:solidFill>
+              </a:rPr>
+              <a:t>•  Sitemap — Árbol del contenido descubierto del objetivo</a:t>
             </a:r>
           </a:p>
         </p:txBody>
@@ -4524,7 +4930,7 @@
                   <a:srgbClr val="0B3D2E"/>
                 </a:solidFill>
               </a:rPr>
-              <a:t>✍️ Ejercicios</a:t>
+              <a:t>🧰 Herramientas y preparación</a:t>
             </a:r>
           </a:p>
         </p:txBody>
@@ -4562,82 +4968,37 @@
                   <a:srgbClr val="22282E"/>
                 </a:solidFill>
               </a:rPr>
-              <a:t>•  Configura Match/Replace para añadir una cabecera personalizada a toda petición.</a:t>
-            </a:r>
-          </a:p>
-          <a:p>
-            <a:pPr>
-              <a:spcAft>
-                <a:spcPts val="600"/>
-              </a:spcAft>
-            </a:pPr>
-            <a:r>
-              <a:rPr sz="1500">
-                <a:solidFill>
-                  <a:srgbClr val="22282E"/>
-                </a:solidFill>
-              </a:rPr>
-              <a:t>•  Usa Intruder en modo cluster bomb sobre dos parámetros a la vez.</a:t>
-            </a:r>
-          </a:p>
-          <a:p>
-            <a:pPr>
-              <a:spcAft>
-                <a:spcPts val="600"/>
-              </a:spcAft>
-            </a:pPr>
-            <a:r>
-              <a:rPr sz="1500">
-                <a:solidFill>
-                  <a:srgbClr val="22282E"/>
-                </a:solidFill>
-              </a:rPr>
-              <a:t>•  Filtra el HTTP history para ver solo respuestas con código 500.</a:t>
-            </a:r>
-          </a:p>
-          <a:p>
-            <a:pPr>
-              <a:spcAft>
-                <a:spcPts val="600"/>
-              </a:spcAft>
-            </a:pPr>
-            <a:r>
-              <a:rPr sz="1500">
-                <a:solidFill>
-                  <a:srgbClr val="22282E"/>
-                </a:solidFill>
-              </a:rPr>
-              <a:t>•  Guarda un item de historia y anótalo en la pestaña de Comentarios.</a:t>
-            </a:r>
-          </a:p>
-          <a:p>
-            <a:pPr>
-              <a:spcAft>
-                <a:spcPts val="600"/>
-              </a:spcAft>
-            </a:pPr>
-            <a:r>
-              <a:rPr sz="1500">
-                <a:solidFill>
-                  <a:srgbClr val="22282E"/>
-                </a:solidFill>
-              </a:rPr>
-              <a:t>•  Instala una extensión del BApp Store (p. ej. "JSON Web Tokens").</a:t>
-            </a:r>
-          </a:p>
-          <a:p>
-            <a:pPr>
-              <a:spcAft>
-                <a:spcPts val="600"/>
-              </a:spcAft>
-            </a:pPr>
-            <a:r>
-              <a:rPr sz="1500">
-                <a:solidFill>
-                  <a:srgbClr val="22282E"/>
-                </a:solidFill>
-              </a:rPr>
-              <a:t>•  Explica la diferencia entre sniper y pitchfork con un ejemplo.</a:t>
+              <a:t>•  Burp Suite Community (gratuita) o Professional.</a:t>
+            </a:r>
+          </a:p>
+          <a:p>
+            <a:pPr>
+              <a:spcAft>
+                <a:spcPts val="600"/>
+              </a:spcAft>
+            </a:pPr>
+            <a:r>
+              <a:rPr sz="1500">
+                <a:solidFill>
+                  <a:srgbClr val="22282E"/>
+                </a:solidFill>
+              </a:rPr>
+              <a:t>•  Navegador dedicado al testing (perfil separado) o el navegador embebido de Burp.</a:t>
+            </a:r>
+          </a:p>
+          <a:p>
+            <a:pPr>
+              <a:spcAft>
+                <a:spcPts val="600"/>
+              </a:spcAft>
+            </a:pPr>
+            <a:r>
+              <a:rPr sz="1500">
+                <a:solidFill>
+                  <a:srgbClr val="22282E"/>
+                </a:solidFill>
+              </a:rPr>
+              <a:t>•  Laboratorio local: Juice Shop o DVWA.</a:t>
             </a:r>
           </a:p>
         </p:txBody>
@@ -4688,7 +5049,7 @@
                   <a:srgbClr val="0B3D2E"/>
                 </a:solidFill>
               </a:rPr>
-              <a:t>📝 Reto verificable</a:t>
+              <a:t>🧪 Laboratorio guiado</a:t>
             </a:r>
           </a:p>
         </p:txBody>
@@ -4726,22 +5087,97 @@
                   <a:srgbClr val="22282E"/>
                 </a:solidFill>
               </a:rPr>
-              <a:t>•  Automatiza con Intruder un ataque de fuerza bruta al login de DVWA con una lista de 50 contraseñas y detecta la válida por diferencia en la longitud/código de respuesta.</a:t>
-            </a:r>
-          </a:p>
-          <a:p>
-            <a:pPr>
-              <a:spcAft>
-                <a:spcPts val="600"/>
-              </a:spcAft>
-            </a:pPr>
-            <a:r>
-              <a:rPr sz="1500">
-                <a:solidFill>
-                  <a:srgbClr val="22282E"/>
-                </a:solidFill>
-              </a:rPr>
-              <a:t>•  Criterio de aceptación: identificas la credencial correcta a partir de la anomalía en la respuesta y documentas la posición de payload y el filtro usado.</a:t>
+              <a:t>•  Instala Burp y configura el listener en 127.0.0.1:8080 (Proxy → Options).</a:t>
+            </a:r>
+          </a:p>
+          <a:p>
+            <a:pPr>
+              <a:spcAft>
+                <a:spcPts val="600"/>
+              </a:spcAft>
+            </a:pPr>
+            <a:r>
+              <a:rPr sz="1500">
+                <a:solidFill>
+                  <a:srgbClr val="22282E"/>
+                </a:solidFill>
+              </a:rPr>
+              <a:t>•  Apunta el navegador a ese proxy o usa el navegador embebido de Burp (más simple).</a:t>
+            </a:r>
+          </a:p>
+          <a:p>
+            <a:pPr>
+              <a:spcAft>
+                <a:spcPts val="600"/>
+              </a:spcAft>
+            </a:pPr>
+            <a:r>
+              <a:rPr sz="1500">
+                <a:solidFill>
+                  <a:srgbClr val="22282E"/>
+                </a:solidFill>
+              </a:rPr>
+              <a:t>•  Exporta e instala el certificado CA para ver HTTPS sin advertencias.</a:t>
+            </a:r>
+          </a:p>
+          <a:p>
+            <a:pPr>
+              <a:spcAft>
+                <a:spcPts val="600"/>
+              </a:spcAft>
+            </a:pPr>
+            <a:r>
+              <a:rPr sz="1500">
+                <a:solidFill>
+                  <a:srgbClr val="22282E"/>
+                </a:solidFill>
+              </a:rPr>
+              <a:t>•  Navega Juice Shop; observa el tráfico en Proxy → HTTP history.</a:t>
+            </a:r>
+          </a:p>
+          <a:p>
+            <a:pPr>
+              <a:spcAft>
+                <a:spcPts val="600"/>
+              </a:spcAft>
+            </a:pPr>
+            <a:r>
+              <a:rPr sz="1500">
+                <a:solidFill>
+                  <a:srgbClr val="22282E"/>
+                </a:solidFill>
+              </a:rPr>
+              <a:t>•  Define el scope: Target → Site map → clic derecho en el host → Add to scope. Activa "show only in-scope".</a:t>
+            </a:r>
+          </a:p>
+          <a:p>
+            <a:pPr>
+              <a:spcAft>
+                <a:spcPts val="600"/>
+              </a:spcAft>
+            </a:pPr>
+            <a:r>
+              <a:rPr sz="1500">
+                <a:solidFill>
+                  <a:srgbClr val="22282E"/>
+                </a:solidFill>
+              </a:rPr>
+              <a:t>•  Intercepta un login (Proxy → Intercept ON), modifica un campo y reenvíalo.</a:t>
+            </a:r>
+          </a:p>
+          <a:p>
+            <a:pPr>
+              <a:spcAft>
+                <a:spcPts val="600"/>
+              </a:spcAft>
+            </a:pPr>
+            <a:r>
+              <a:rPr sz="1500">
+                <a:solidFill>
+                  <a:srgbClr val="22282E"/>
+                </a:solidFill>
+              </a:rPr>
+              <a:t>•  Envía esa petición a Repeater (Ctrl+R) y prueba variaciones del parámetro.</a:t>
             </a:r>
           </a:p>
         </p:txBody>
